--- a/assets/figures-editable/appendix-studies/a-e12.pptx
+++ b/assets/figures-editable/appendix-studies/a-e12.pptx
@@ -7,7 +7,7 @@
   <p:sldIdLst>
     <p:sldId id="256" r:id="rId7"/>
   </p:sldIdLst>
-  <p:sldSz cx="8961120" cy="5870448" type="screen4x3"/>
+  <p:sldSz cx="12191695" cy="6858000" type="screen4x3"/>
   <p:notesSz cx="6858000" cy="9144000"/>
   <p:defaultTextStyle>
     <a:defPPr>
@@ -3098,14 +3098,14 @@
       <p:grpSpPr/>
       <p:sp>
         <p:nvSpPr>
-          <p:cNvPr id="2" name="text 0" descr="sci-ppt:obj-000"/>
+          <p:cNvPr id="2" name="A-E12 text 0" descr="sci-ppt:o000"/>
           <p:cNvSpPr txBox="1"/>
           <p:nvPr/>
         </p:nvSpPr>
         <p:spPr>
           <a:xfrm>
-            <a:off x="256032" y="137160"/>
-            <a:ext cx="7315200" cy="310896"/>
+            <a:off x="274320" y="118872"/>
+            <a:ext cx="11612880" cy="340105"/>
           </a:xfrm>
           <a:prstGeom prst="rect">
             <a:avLst/>
@@ -3114,7 +3114,7 @@
           <a:effectLst/>
         </p:spPr>
         <p:txBody>
-          <a:bodyPr wrap="none" lIns="0" rIns="0" tIns="0" bIns="0" anchor="ctr">
+          <a:bodyPr wrap="none" lIns="18288" rIns="18288" tIns="18288" bIns="18288" anchor="t">
             <a:spAutoFit/>
           </a:bodyPr>
           <a:lstStyle/>
@@ -3125,67 +3125,1121 @@
               </a:spcAft>
             </a:pPr>
             <a:r>
-              <a:rPr sz="1439" b="0" i="0">
+              <a:rPr sz="1900" b="1" i="0">
                 <a:solidFill>
                   <a:srgbClr val="8EDBD4"/>
                 </a:solidFill>
                 <a:latin typeface="Arial"/>
               </a:rPr>
-              <a:t>A-E12 · Physical variable map</a:t>
-            </a:r>
-          </a:p>
-        </p:txBody>
-      </p:sp>
-      <p:sp>
-        <p:nvSpPr>
-          <p:cNvPr id="3" name="ellipse 1" descr="sci-ppt:obj-001"/>
-          <p:cNvSpPr/>
+              <a:t>A-E12 · Derived mechanical energy balance</a:t>
+            </a:r>
+          </a:p>
+        </p:txBody>
+      </p:sp>
+      <p:sp>
+        <p:nvSpPr>
+          <p:cNvPr id="3" name="A-E12 text 1" descr="sci-ppt:o001"/>
+          <p:cNvSpPr txBox="1"/>
           <p:nvPr/>
         </p:nvSpPr>
         <p:spPr>
           <a:xfrm>
-            <a:off x="941832" y="932688"/>
-            <a:ext cx="1408176" cy="1408176"/>
-          </a:xfrm>
-          <a:prstGeom prst="ellipse">
+            <a:off x="457200" y="914400"/>
+            <a:ext cx="6400800" cy="254889"/>
+          </a:xfrm>
+          <a:prstGeom prst="rect">
             <a:avLst/>
           </a:prstGeom>
           <a:noFill/>
-          <a:ln w="17780">
+          <a:effectLst/>
+        </p:spPr>
+        <p:txBody>
+          <a:bodyPr wrap="none" lIns="18288" rIns="18288" tIns="18288" bIns="18288" anchor="t">
+            <a:spAutoFit/>
+          </a:bodyPr>
+          <a:lstStyle/>
+          <a:p>
+            <a:pPr algn="l">
+              <a:spcAft>
+                <a:spcPts val="0"/>
+              </a:spcAft>
+            </a:pPr>
+            <a:r>
+              <a:rPr sz="1350" b="1" i="0">
+                <a:solidFill>
+                  <a:srgbClr val="8EDBD4"/>
+                </a:solidFill>
+                <a:latin typeface="Arial"/>
+              </a:rPr>
+              <a:t>Where the pressure power goes (schematic share)</a:t>
+            </a:r>
+          </a:p>
+        </p:txBody>
+      </p:sp>
+      <p:cxnSp>
+        <p:nvCxnSpPr>
+          <p:cNvPr id="4" name="A-E12 line 2" descr="sci-ppt:o002"/>
+          <p:cNvCxnSpPr/>
+          <p:nvPr/>
+        </p:nvCxnSpPr>
+        <p:spPr>
+          <a:xfrm>
+            <a:off x="548640" y="4754880"/>
+            <a:ext cx="6400800" cy="0"/>
+          </a:xfrm>
+          <a:prstGeom prst="line">
+            <a:avLst/>
+          </a:prstGeom>
+          <a:ln w="19050">
             <a:solidFill>
               <a:srgbClr val="B4C7D2"/>
             </a:solidFill>
           </a:ln>
           <a:effectLst/>
         </p:spPr>
-        <p:txBody>
-          <a:bodyPr rtlCol="0" anchor="ctr"/>
-          <a:lstStyle/>
-          <a:p>
-            <a:pPr algn="ctr"/>
-          </a:p>
-        </p:txBody>
-      </p:sp>
-      <p:sp>
-        <p:nvSpPr>
-          <p:cNvPr id="4" name="ellipse 2" descr="sci-ppt:obj-002"/>
+      </p:cxnSp>
+      <p:cxnSp>
+        <p:nvCxnSpPr>
+          <p:cNvPr id="5" name="A-E12 line 3" descr="sci-ppt:o003"/>
+          <p:cNvCxnSpPr/>
+          <p:nvPr/>
+        </p:nvCxnSpPr>
+        <p:spPr>
+          <a:xfrm>
+            <a:off x="548640" y="1463040"/>
+            <a:ext cx="0" cy="3291840"/>
+          </a:xfrm>
+          <a:prstGeom prst="line">
+            <a:avLst/>
+          </a:prstGeom>
+          <a:ln w="19050">
+            <a:solidFill>
+              <a:srgbClr val="B4C7D2"/>
+            </a:solidFill>
+          </a:ln>
+          <a:effectLst/>
+        </p:spPr>
+      </p:cxnSp>
+      <p:cxnSp>
+        <p:nvCxnSpPr>
+          <p:cNvPr id="6" name="A-E12 line 4" descr="sci-ppt:o004"/>
+          <p:cNvCxnSpPr/>
+          <p:nvPr/>
+        </p:nvCxnSpPr>
+        <p:spPr>
+          <a:xfrm>
+            <a:off x="484632" y="4754880"/>
+            <a:ext cx="64008" cy="0"/>
+          </a:xfrm>
+          <a:prstGeom prst="line">
+            <a:avLst/>
+          </a:prstGeom>
+          <a:ln w="12700">
+            <a:solidFill>
+              <a:srgbClr val="B4C7D2"/>
+            </a:solidFill>
+          </a:ln>
+          <a:effectLst/>
+        </p:spPr>
+      </p:cxnSp>
+      <p:cxnSp>
+        <p:nvCxnSpPr>
+          <p:cNvPr id="7" name="A-E12 line 5" descr="sci-ppt:o005"/>
+          <p:cNvCxnSpPr/>
+          <p:nvPr/>
+        </p:nvCxnSpPr>
+        <p:spPr>
+          <a:xfrm>
+            <a:off x="548640" y="4754880"/>
+            <a:ext cx="6400800" cy="0"/>
+          </a:xfrm>
+          <a:prstGeom prst="line">
+            <a:avLst/>
+          </a:prstGeom>
+          <a:ln w="7620">
+            <a:solidFill>
+              <a:srgbClr val="2E4756"/>
+            </a:solidFill>
+          </a:ln>
+          <a:effectLst/>
+        </p:spPr>
+      </p:cxnSp>
+      <p:sp>
+        <p:nvSpPr>
+          <p:cNvPr id="8" name="A-E12 text 6" descr="sci-ppt:o006"/>
+          <p:cNvSpPr txBox="1"/>
+          <p:nvPr/>
+        </p:nvSpPr>
+        <p:spPr>
+          <a:xfrm>
+            <a:off x="-320040" y="4672584"/>
+            <a:ext cx="777240" cy="208407"/>
+          </a:xfrm>
+          <a:prstGeom prst="rect">
+            <a:avLst/>
+          </a:prstGeom>
+          <a:noFill/>
+          <a:effectLst/>
+        </p:spPr>
+        <p:txBody>
+          <a:bodyPr wrap="none" lIns="18288" rIns="18288" tIns="18288" bIns="18288" anchor="t">
+            <a:spAutoFit/>
+          </a:bodyPr>
+          <a:lstStyle/>
+          <a:p>
+            <a:pPr algn="r">
+              <a:spcAft>
+                <a:spcPts val="0"/>
+              </a:spcAft>
+            </a:pPr>
+            <a:r>
+              <a:rPr sz="1050" b="0" i="0">
+                <a:solidFill>
+                  <a:srgbClr val="B4C7D2"/>
+                </a:solidFill>
+                <a:latin typeface="Arial"/>
+              </a:rPr>
+              <a:t>0</a:t>
+            </a:r>
+          </a:p>
+        </p:txBody>
+      </p:sp>
+      <p:cxnSp>
+        <p:nvCxnSpPr>
+          <p:cNvPr id="9" name="A-E12 line 7" descr="sci-ppt:o007"/>
+          <p:cNvCxnSpPr/>
+          <p:nvPr/>
+        </p:nvCxnSpPr>
+        <p:spPr>
+          <a:xfrm>
+            <a:off x="484632" y="4069080"/>
+            <a:ext cx="64008" cy="0"/>
+          </a:xfrm>
+          <a:prstGeom prst="line">
+            <a:avLst/>
+          </a:prstGeom>
+          <a:ln w="12700">
+            <a:solidFill>
+              <a:srgbClr val="B4C7D2"/>
+            </a:solidFill>
+          </a:ln>
+          <a:effectLst/>
+        </p:spPr>
+      </p:cxnSp>
+      <p:cxnSp>
+        <p:nvCxnSpPr>
+          <p:cNvPr id="10" name="A-E12 line 8" descr="sci-ppt:o008"/>
+          <p:cNvCxnSpPr/>
+          <p:nvPr/>
+        </p:nvCxnSpPr>
+        <p:spPr>
+          <a:xfrm>
+            <a:off x="548640" y="4069080"/>
+            <a:ext cx="6400800" cy="0"/>
+          </a:xfrm>
+          <a:prstGeom prst="line">
+            <a:avLst/>
+          </a:prstGeom>
+          <a:ln w="7620">
+            <a:solidFill>
+              <a:srgbClr val="2E4756"/>
+            </a:solidFill>
+          </a:ln>
+          <a:effectLst/>
+        </p:spPr>
+      </p:cxnSp>
+      <p:sp>
+        <p:nvSpPr>
+          <p:cNvPr id="11" name="A-E12 text 9" descr="sci-ppt:o009"/>
+          <p:cNvSpPr txBox="1"/>
+          <p:nvPr/>
+        </p:nvSpPr>
+        <p:spPr>
+          <a:xfrm>
+            <a:off x="-320040" y="3986784"/>
+            <a:ext cx="777240" cy="208407"/>
+          </a:xfrm>
+          <a:prstGeom prst="rect">
+            <a:avLst/>
+          </a:prstGeom>
+          <a:noFill/>
+          <a:effectLst/>
+        </p:spPr>
+        <p:txBody>
+          <a:bodyPr wrap="none" lIns="18288" rIns="18288" tIns="18288" bIns="18288" anchor="t">
+            <a:spAutoFit/>
+          </a:bodyPr>
+          <a:lstStyle/>
+          <a:p>
+            <a:pPr algn="r">
+              <a:spcAft>
+                <a:spcPts val="0"/>
+              </a:spcAft>
+            </a:pPr>
+            <a:r>
+              <a:rPr sz="1050" b="0" i="0">
+                <a:solidFill>
+                  <a:srgbClr val="B4C7D2"/>
+                </a:solidFill>
+                <a:latin typeface="Arial"/>
+              </a:rPr>
+              <a:t>0.25</a:t>
+            </a:r>
+          </a:p>
+        </p:txBody>
+      </p:sp>
+      <p:cxnSp>
+        <p:nvCxnSpPr>
+          <p:cNvPr id="12" name="A-E12 line 10" descr="sci-ppt:o010"/>
+          <p:cNvCxnSpPr/>
+          <p:nvPr/>
+        </p:nvCxnSpPr>
+        <p:spPr>
+          <a:xfrm>
+            <a:off x="484632" y="3383280"/>
+            <a:ext cx="64008" cy="0"/>
+          </a:xfrm>
+          <a:prstGeom prst="line">
+            <a:avLst/>
+          </a:prstGeom>
+          <a:ln w="12700">
+            <a:solidFill>
+              <a:srgbClr val="B4C7D2"/>
+            </a:solidFill>
+          </a:ln>
+          <a:effectLst/>
+        </p:spPr>
+      </p:cxnSp>
+      <p:cxnSp>
+        <p:nvCxnSpPr>
+          <p:cNvPr id="13" name="A-E12 line 11" descr="sci-ppt:o011"/>
+          <p:cNvCxnSpPr/>
+          <p:nvPr/>
+        </p:nvCxnSpPr>
+        <p:spPr>
+          <a:xfrm>
+            <a:off x="548640" y="3383280"/>
+            <a:ext cx="6400800" cy="0"/>
+          </a:xfrm>
+          <a:prstGeom prst="line">
+            <a:avLst/>
+          </a:prstGeom>
+          <a:ln w="7620">
+            <a:solidFill>
+              <a:srgbClr val="2E4756"/>
+            </a:solidFill>
+          </a:ln>
+          <a:effectLst/>
+        </p:spPr>
+      </p:cxnSp>
+      <p:sp>
+        <p:nvSpPr>
+          <p:cNvPr id="14" name="A-E12 text 12" descr="sci-ppt:o012"/>
+          <p:cNvSpPr txBox="1"/>
+          <p:nvPr/>
+        </p:nvSpPr>
+        <p:spPr>
+          <a:xfrm>
+            <a:off x="-320040" y="3300984"/>
+            <a:ext cx="777240" cy="208407"/>
+          </a:xfrm>
+          <a:prstGeom prst="rect">
+            <a:avLst/>
+          </a:prstGeom>
+          <a:noFill/>
+          <a:effectLst/>
+        </p:spPr>
+        <p:txBody>
+          <a:bodyPr wrap="none" lIns="18288" rIns="18288" tIns="18288" bIns="18288" anchor="t">
+            <a:spAutoFit/>
+          </a:bodyPr>
+          <a:lstStyle/>
+          <a:p>
+            <a:pPr algn="r">
+              <a:spcAft>
+                <a:spcPts val="0"/>
+              </a:spcAft>
+            </a:pPr>
+            <a:r>
+              <a:rPr sz="1050" b="0" i="0">
+                <a:solidFill>
+                  <a:srgbClr val="B4C7D2"/>
+                </a:solidFill>
+                <a:latin typeface="Arial"/>
+              </a:rPr>
+              <a:t>0.5</a:t>
+            </a:r>
+          </a:p>
+        </p:txBody>
+      </p:sp>
+      <p:cxnSp>
+        <p:nvCxnSpPr>
+          <p:cNvPr id="15" name="A-E12 line 13" descr="sci-ppt:o013"/>
+          <p:cNvCxnSpPr/>
+          <p:nvPr/>
+        </p:nvCxnSpPr>
+        <p:spPr>
+          <a:xfrm>
+            <a:off x="484632" y="2697480"/>
+            <a:ext cx="64008" cy="0"/>
+          </a:xfrm>
+          <a:prstGeom prst="line">
+            <a:avLst/>
+          </a:prstGeom>
+          <a:ln w="12700">
+            <a:solidFill>
+              <a:srgbClr val="B4C7D2"/>
+            </a:solidFill>
+          </a:ln>
+          <a:effectLst/>
+        </p:spPr>
+      </p:cxnSp>
+      <p:cxnSp>
+        <p:nvCxnSpPr>
+          <p:cNvPr id="16" name="A-E12 line 14" descr="sci-ppt:o014"/>
+          <p:cNvCxnSpPr/>
+          <p:nvPr/>
+        </p:nvCxnSpPr>
+        <p:spPr>
+          <a:xfrm>
+            <a:off x="548640" y="2697480"/>
+            <a:ext cx="6400800" cy="0"/>
+          </a:xfrm>
+          <a:prstGeom prst="line">
+            <a:avLst/>
+          </a:prstGeom>
+          <a:ln w="7620">
+            <a:solidFill>
+              <a:srgbClr val="2E4756"/>
+            </a:solidFill>
+          </a:ln>
+          <a:effectLst/>
+        </p:spPr>
+      </p:cxnSp>
+      <p:sp>
+        <p:nvSpPr>
+          <p:cNvPr id="17" name="A-E12 text 15" descr="sci-ppt:o015"/>
+          <p:cNvSpPr txBox="1"/>
+          <p:nvPr/>
+        </p:nvSpPr>
+        <p:spPr>
+          <a:xfrm>
+            <a:off x="-320040" y="2615184"/>
+            <a:ext cx="777240" cy="208407"/>
+          </a:xfrm>
+          <a:prstGeom prst="rect">
+            <a:avLst/>
+          </a:prstGeom>
+          <a:noFill/>
+          <a:effectLst/>
+        </p:spPr>
+        <p:txBody>
+          <a:bodyPr wrap="none" lIns="18288" rIns="18288" tIns="18288" bIns="18288" anchor="t">
+            <a:spAutoFit/>
+          </a:bodyPr>
+          <a:lstStyle/>
+          <a:p>
+            <a:pPr algn="r">
+              <a:spcAft>
+                <a:spcPts val="0"/>
+              </a:spcAft>
+            </a:pPr>
+            <a:r>
+              <a:rPr sz="1050" b="0" i="0">
+                <a:solidFill>
+                  <a:srgbClr val="B4C7D2"/>
+                </a:solidFill>
+                <a:latin typeface="Arial"/>
+              </a:rPr>
+              <a:t>0.75</a:t>
+            </a:r>
+          </a:p>
+        </p:txBody>
+      </p:sp>
+      <p:cxnSp>
+        <p:nvCxnSpPr>
+          <p:cNvPr id="18" name="A-E12 line 16" descr="sci-ppt:o016"/>
+          <p:cNvCxnSpPr/>
+          <p:nvPr/>
+        </p:nvCxnSpPr>
+        <p:spPr>
+          <a:xfrm>
+            <a:off x="484632" y="2011680"/>
+            <a:ext cx="64008" cy="0"/>
+          </a:xfrm>
+          <a:prstGeom prst="line">
+            <a:avLst/>
+          </a:prstGeom>
+          <a:ln w="12700">
+            <a:solidFill>
+              <a:srgbClr val="B4C7D2"/>
+            </a:solidFill>
+          </a:ln>
+          <a:effectLst/>
+        </p:spPr>
+      </p:cxnSp>
+      <p:cxnSp>
+        <p:nvCxnSpPr>
+          <p:cNvPr id="19" name="A-E12 line 17" descr="sci-ppt:o017"/>
+          <p:cNvCxnSpPr/>
+          <p:nvPr/>
+        </p:nvCxnSpPr>
+        <p:spPr>
+          <a:xfrm>
+            <a:off x="548640" y="2011680"/>
+            <a:ext cx="6400800" cy="0"/>
+          </a:xfrm>
+          <a:prstGeom prst="line">
+            <a:avLst/>
+          </a:prstGeom>
+          <a:ln w="7620">
+            <a:solidFill>
+              <a:srgbClr val="2E4756"/>
+            </a:solidFill>
+          </a:ln>
+          <a:effectLst/>
+        </p:spPr>
+      </p:cxnSp>
+      <p:sp>
+        <p:nvSpPr>
+          <p:cNvPr id="20" name="A-E12 text 18" descr="sci-ppt:o018"/>
+          <p:cNvSpPr txBox="1"/>
+          <p:nvPr/>
+        </p:nvSpPr>
+        <p:spPr>
+          <a:xfrm>
+            <a:off x="-320040" y="1929384"/>
+            <a:ext cx="777240" cy="208407"/>
+          </a:xfrm>
+          <a:prstGeom prst="rect">
+            <a:avLst/>
+          </a:prstGeom>
+          <a:noFill/>
+          <a:effectLst/>
+        </p:spPr>
+        <p:txBody>
+          <a:bodyPr wrap="none" lIns="18288" rIns="18288" tIns="18288" bIns="18288" anchor="t">
+            <a:spAutoFit/>
+          </a:bodyPr>
+          <a:lstStyle/>
+          <a:p>
+            <a:pPr algn="r">
+              <a:spcAft>
+                <a:spcPts val="0"/>
+              </a:spcAft>
+            </a:pPr>
+            <a:r>
+              <a:rPr sz="1050" b="0" i="0">
+                <a:solidFill>
+                  <a:srgbClr val="B4C7D2"/>
+                </a:solidFill>
+                <a:latin typeface="Arial"/>
+              </a:rPr>
+              <a:t>1</a:t>
+            </a:r>
+          </a:p>
+        </p:txBody>
+      </p:sp>
+      <p:sp>
+        <p:nvSpPr>
+          <p:cNvPr id="21" name="A-E12 rect 19" descr="sci-ppt:o019"/>
           <p:cNvSpPr/>
           <p:nvPr/>
         </p:nvSpPr>
         <p:spPr>
           <a:xfrm>
-            <a:off x="1380744" y="1371600"/>
-            <a:ext cx="530352" cy="530352"/>
-          </a:xfrm>
-          <a:prstGeom prst="ellipse">
+            <a:off x="727862" y="2011680"/>
+            <a:ext cx="921715" cy="2743200"/>
+          </a:xfrm>
+          <a:prstGeom prst="rect">
+            <a:avLst/>
+          </a:prstGeom>
+          <a:solidFill>
+            <a:srgbClr val="8EDBD4">
+              <a:alpha val="85000"/>
+            </a:srgbClr>
+          </a:solidFill>
+          <a:ln w="12700">
+            <a:solidFill>
+              <a:srgbClr val="8EDBD4">
+                <a:alpha val="85000"/>
+              </a:srgbClr>
+            </a:solidFill>
+          </a:ln>
+          <a:effectLst/>
+        </p:spPr>
+        <p:txBody>
+          <a:bodyPr rtlCol="0" anchor="ctr"/>
+          <a:lstStyle/>
+          <a:p>
+            <a:pPr algn="ctr"/>
+          </a:p>
+        </p:txBody>
+      </p:sp>
+      <p:sp>
+        <p:nvSpPr>
+          <p:cNvPr id="22" name="A-E12 text 20" descr="sci-ppt:o020"/>
+          <p:cNvSpPr txBox="1"/>
+          <p:nvPr/>
+        </p:nvSpPr>
+        <p:spPr>
+          <a:xfrm>
+            <a:off x="499262" y="1737360"/>
+            <a:ext cx="1378915" cy="223900"/>
+          </a:xfrm>
+          <a:prstGeom prst="rect">
+            <a:avLst/>
+          </a:prstGeom>
+          <a:noFill/>
+          <a:effectLst/>
+        </p:spPr>
+        <p:txBody>
+          <a:bodyPr wrap="none" lIns="18288" rIns="18288" tIns="18288" bIns="18288" anchor="t">
+            <a:spAutoFit/>
+          </a:bodyPr>
+          <a:lstStyle/>
+          <a:p>
+            <a:pPr algn="ctr">
+              <a:spcAft>
+                <a:spcPts val="0"/>
+              </a:spcAft>
+            </a:pPr>
+            <a:r>
+              <a:rPr sz="1150" b="1" i="0">
+                <a:solidFill>
+                  <a:srgbClr val="E7F0F3"/>
+                </a:solidFill>
+                <a:latin typeface="Arial"/>
+              </a:rPr>
+              <a:t>1.00</a:t>
+            </a:r>
+          </a:p>
+        </p:txBody>
+      </p:sp>
+      <p:sp>
+        <p:nvSpPr>
+          <p:cNvPr id="23" name="A-E12 text 21" descr="sci-ppt:o021"/>
+          <p:cNvSpPr txBox="1"/>
+          <p:nvPr/>
+        </p:nvSpPr>
+        <p:spPr>
+          <a:xfrm>
+            <a:off x="453542" y="4828032"/>
+            <a:ext cx="1470355" cy="216153"/>
+          </a:xfrm>
+          <a:prstGeom prst="rect">
+            <a:avLst/>
+          </a:prstGeom>
+          <a:noFill/>
+          <a:effectLst/>
+        </p:spPr>
+        <p:txBody>
+          <a:bodyPr wrap="none" lIns="18288" rIns="18288" tIns="18288" bIns="18288" anchor="t">
+            <a:spAutoFit/>
+          </a:bodyPr>
+          <a:lstStyle/>
+          <a:p>
+            <a:pPr algn="ctr">
+              <a:spcAft>
+                <a:spcPts val="0"/>
+              </a:spcAft>
+            </a:pPr>
+            <a:r>
+              <a:rPr sz="1100" b="0" i="0">
+                <a:solidFill>
+                  <a:srgbClr val="B4C7D2"/>
+                </a:solidFill>
+                <a:latin typeface="Arial"/>
+              </a:rPr>
+              <a:t>(p_b−p_∞)V̇</a:t>
+            </a:r>
+          </a:p>
+        </p:txBody>
+      </p:sp>
+      <p:sp>
+        <p:nvSpPr>
+          <p:cNvPr id="24" name="A-E12 rect 22" descr="sci-ppt:o022"/>
+          <p:cNvSpPr/>
+          <p:nvPr/>
+        </p:nvSpPr>
+        <p:spPr>
+          <a:xfrm>
+            <a:off x="2008022" y="2011680"/>
+            <a:ext cx="921715" cy="768095"/>
+          </a:xfrm>
+          <a:prstGeom prst="rect">
+            <a:avLst/>
+          </a:prstGeom>
+          <a:solidFill>
+            <a:srgbClr val="F28BA0">
+              <a:alpha val="85000"/>
+            </a:srgbClr>
+          </a:solidFill>
+          <a:ln w="12700">
+            <a:solidFill>
+              <a:srgbClr val="F28BA0">
+                <a:alpha val="85000"/>
+              </a:srgbClr>
+            </a:solidFill>
+          </a:ln>
+          <a:effectLst/>
+        </p:spPr>
+        <p:txBody>
+          <a:bodyPr rtlCol="0" anchor="ctr"/>
+          <a:lstStyle/>
+          <a:p>
+            <a:pPr algn="ctr"/>
+          </a:p>
+        </p:txBody>
+      </p:sp>
+      <p:sp>
+        <p:nvSpPr>
+          <p:cNvPr id="25" name="A-E12 text 23" descr="sci-ppt:o023"/>
+          <p:cNvSpPr txBox="1"/>
+          <p:nvPr/>
+        </p:nvSpPr>
+        <p:spPr>
+          <a:xfrm>
+            <a:off x="1779422" y="1737360"/>
+            <a:ext cx="1378915" cy="223900"/>
+          </a:xfrm>
+          <a:prstGeom prst="rect">
+            <a:avLst/>
+          </a:prstGeom>
+          <a:noFill/>
+          <a:effectLst/>
+        </p:spPr>
+        <p:txBody>
+          <a:bodyPr wrap="none" lIns="18288" rIns="18288" tIns="18288" bIns="18288" anchor="t">
+            <a:spAutoFit/>
+          </a:bodyPr>
+          <a:lstStyle/>
+          <a:p>
+            <a:pPr algn="ctr">
+              <a:spcAft>
+                <a:spcPts val="0"/>
+              </a:spcAft>
+            </a:pPr>
+            <a:r>
+              <a:rPr sz="1150" b="1" i="0">
+                <a:solidFill>
+                  <a:srgbClr val="E7F0F3"/>
+                </a:solidFill>
+                <a:latin typeface="Arial"/>
+              </a:rPr>
+              <a:t>-0.28</a:t>
+            </a:r>
+          </a:p>
+        </p:txBody>
+      </p:sp>
+      <p:sp>
+        <p:nvSpPr>
+          <p:cNvPr id="26" name="A-E12 text 24" descr="sci-ppt:o024"/>
+          <p:cNvSpPr txBox="1"/>
+          <p:nvPr/>
+        </p:nvSpPr>
+        <p:spPr>
+          <a:xfrm>
+            <a:off x="1733702" y="4828032"/>
+            <a:ext cx="1470355" cy="216153"/>
+          </a:xfrm>
+          <a:prstGeom prst="rect">
+            <a:avLst/>
+          </a:prstGeom>
+          <a:noFill/>
+          <a:effectLst/>
+        </p:spPr>
+        <p:txBody>
+          <a:bodyPr wrap="none" lIns="18288" rIns="18288" tIns="18288" bIns="18288" anchor="t">
+            <a:spAutoFit/>
+          </a:bodyPr>
+          <a:lstStyle/>
+          <a:p>
+            <a:pPr algn="ctr">
+              <a:spcAft>
+                <a:spcPts val="0"/>
+              </a:spcAft>
+            </a:pPr>
+            <a:r>
+              <a:rPr sz="1100" b="0" i="0">
+                <a:solidFill>
+                  <a:srgbClr val="B4C7D2"/>
+                </a:solidFill>
+                <a:latin typeface="Arial"/>
+              </a:rPr>
+              <a:t>− P_dis</a:t>
+            </a:r>
+          </a:p>
+        </p:txBody>
+      </p:sp>
+      <p:sp>
+        <p:nvSpPr>
+          <p:cNvPr id="27" name="A-E12 rect 25" descr="sci-ppt:o025"/>
+          <p:cNvSpPr/>
+          <p:nvPr/>
+        </p:nvSpPr>
+        <p:spPr>
+          <a:xfrm>
+            <a:off x="3288182" y="2779776"/>
+            <a:ext cx="921715" cy="137159"/>
+          </a:xfrm>
+          <a:prstGeom prst="rect">
+            <a:avLst/>
+          </a:prstGeom>
+          <a:solidFill>
+            <a:srgbClr val="F2B880">
+              <a:alpha val="85000"/>
+            </a:srgbClr>
+          </a:solidFill>
+          <a:ln w="12700">
+            <a:solidFill>
+              <a:srgbClr val="F2B880">
+                <a:alpha val="85000"/>
+              </a:srgbClr>
+            </a:solidFill>
+          </a:ln>
+          <a:effectLst/>
+        </p:spPr>
+        <p:txBody>
+          <a:bodyPr rtlCol="0" anchor="ctr"/>
+          <a:lstStyle/>
+          <a:p>
+            <a:pPr algn="ctr"/>
+          </a:p>
+        </p:txBody>
+      </p:sp>
+      <p:sp>
+        <p:nvSpPr>
+          <p:cNvPr id="28" name="A-E12 text 26" descr="sci-ppt:o026"/>
+          <p:cNvSpPr txBox="1"/>
+          <p:nvPr/>
+        </p:nvSpPr>
+        <p:spPr>
+          <a:xfrm>
+            <a:off x="3059582" y="2505456"/>
+            <a:ext cx="1378915" cy="223900"/>
+          </a:xfrm>
+          <a:prstGeom prst="rect">
+            <a:avLst/>
+          </a:prstGeom>
+          <a:noFill/>
+          <a:effectLst/>
+        </p:spPr>
+        <p:txBody>
+          <a:bodyPr wrap="none" lIns="18288" rIns="18288" tIns="18288" bIns="18288" anchor="t">
+            <a:spAutoFit/>
+          </a:bodyPr>
+          <a:lstStyle/>
+          <a:p>
+            <a:pPr algn="ctr">
+              <a:spcAft>
+                <a:spcPts val="0"/>
+              </a:spcAft>
+            </a:pPr>
+            <a:r>
+              <a:rPr sz="1150" b="1" i="0">
+                <a:solidFill>
+                  <a:srgbClr val="E7F0F3"/>
+                </a:solidFill>
+                <a:latin typeface="Arial"/>
+              </a:rPr>
+              <a:t>-0.05</a:t>
+            </a:r>
+          </a:p>
+        </p:txBody>
+      </p:sp>
+      <p:sp>
+        <p:nvSpPr>
+          <p:cNvPr id="29" name="A-E12 text 27" descr="sci-ppt:o027"/>
+          <p:cNvSpPr txBox="1"/>
+          <p:nvPr/>
+        </p:nvSpPr>
+        <p:spPr>
+          <a:xfrm>
+            <a:off x="3013862" y="4828032"/>
+            <a:ext cx="1470355" cy="216153"/>
+          </a:xfrm>
+          <a:prstGeom prst="rect">
+            <a:avLst/>
+          </a:prstGeom>
+          <a:noFill/>
+          <a:effectLst/>
+        </p:spPr>
+        <p:txBody>
+          <a:bodyPr wrap="none" lIns="18288" rIns="18288" tIns="18288" bIns="18288" anchor="t">
+            <a:spAutoFit/>
+          </a:bodyPr>
+          <a:lstStyle/>
+          <a:p>
+            <a:pPr algn="ctr">
+              <a:spcAft>
+                <a:spcPts val="0"/>
+              </a:spcAft>
+            </a:pPr>
+            <a:r>
+              <a:rPr sz="1100" b="0" i="0">
+                <a:solidFill>
+                  <a:srgbClr val="B4C7D2"/>
+                </a:solidFill>
+                <a:latin typeface="Arial"/>
+              </a:rPr>
+              <a:t>− dE_σ/dt</a:t>
+            </a:r>
+          </a:p>
+        </p:txBody>
+      </p:sp>
+      <p:sp>
+        <p:nvSpPr>
+          <p:cNvPr id="30" name="A-E12 rect 28" descr="sci-ppt:o028"/>
+          <p:cNvSpPr/>
+          <p:nvPr/>
+        </p:nvSpPr>
+        <p:spPr>
+          <a:xfrm>
+            <a:off x="4568342" y="2916936"/>
+            <a:ext cx="921715" cy="877824"/>
+          </a:xfrm>
+          <a:prstGeom prst="rect">
+            <a:avLst/>
+          </a:prstGeom>
+          <a:solidFill>
+            <a:srgbClr val="7FC8F8">
+              <a:alpha val="85000"/>
+            </a:srgbClr>
+          </a:solidFill>
+          <a:ln w="12700">
+            <a:solidFill>
+              <a:srgbClr val="7FC8F8">
+                <a:alpha val="85000"/>
+              </a:srgbClr>
+            </a:solidFill>
+          </a:ln>
+          <a:effectLst/>
+        </p:spPr>
+        <p:txBody>
+          <a:bodyPr rtlCol="0" anchor="ctr"/>
+          <a:lstStyle/>
+          <a:p>
+            <a:pPr algn="ctr"/>
+          </a:p>
+        </p:txBody>
+      </p:sp>
+      <p:sp>
+        <p:nvSpPr>
+          <p:cNvPr id="31" name="A-E12 text 29" descr="sci-ppt:o029"/>
+          <p:cNvSpPr txBox="1"/>
+          <p:nvPr/>
+        </p:nvSpPr>
+        <p:spPr>
+          <a:xfrm>
+            <a:off x="4339742" y="2642616"/>
+            <a:ext cx="1378915" cy="223900"/>
+          </a:xfrm>
+          <a:prstGeom prst="rect">
+            <a:avLst/>
+          </a:prstGeom>
+          <a:noFill/>
+          <a:effectLst/>
+        </p:spPr>
+        <p:txBody>
+          <a:bodyPr wrap="none" lIns="18288" rIns="18288" tIns="18288" bIns="18288" anchor="t">
+            <a:spAutoFit/>
+          </a:bodyPr>
+          <a:lstStyle/>
+          <a:p>
+            <a:pPr algn="ctr">
+              <a:spcAft>
+                <a:spcPts val="0"/>
+              </a:spcAft>
+            </a:pPr>
+            <a:r>
+              <a:rPr sz="1150" b="1" i="0">
+                <a:solidFill>
+                  <a:srgbClr val="E7F0F3"/>
+                </a:solidFill>
+                <a:latin typeface="Arial"/>
+              </a:rPr>
+              <a:t>-0.32</a:t>
+            </a:r>
+          </a:p>
+        </p:txBody>
+      </p:sp>
+      <p:sp>
+        <p:nvSpPr>
+          <p:cNvPr id="32" name="A-E12 text 30" descr="sci-ppt:o030"/>
+          <p:cNvSpPr txBox="1"/>
+          <p:nvPr/>
+        </p:nvSpPr>
+        <p:spPr>
+          <a:xfrm>
+            <a:off x="4294022" y="4828032"/>
+            <a:ext cx="1470355" cy="216153"/>
+          </a:xfrm>
+          <a:prstGeom prst="rect">
+            <a:avLst/>
+          </a:prstGeom>
+          <a:noFill/>
+          <a:effectLst/>
+        </p:spPr>
+        <p:txBody>
+          <a:bodyPr wrap="none" lIns="18288" rIns="18288" tIns="18288" bIns="18288" anchor="t">
+            <a:spAutoFit/>
+          </a:bodyPr>
+          <a:lstStyle/>
+          <a:p>
+            <a:pPr algn="ctr">
+              <a:spcAft>
+                <a:spcPts val="0"/>
+              </a:spcAft>
+            </a:pPr>
+            <a:r>
+              <a:rPr sz="1100" b="0" i="0">
+                <a:solidFill>
+                  <a:srgbClr val="B4C7D2"/>
+                </a:solidFill>
+                <a:latin typeface="Arial"/>
+              </a:rPr>
+              <a:t>− dW_g/dt</a:t>
+            </a:r>
+          </a:p>
+        </p:txBody>
+      </p:sp>
+      <p:sp>
+        <p:nvSpPr>
+          <p:cNvPr id="33" name="A-E12 rect 31" descr="sci-ppt:o031"/>
+          <p:cNvSpPr/>
+          <p:nvPr/>
+        </p:nvSpPr>
+        <p:spPr>
+          <a:xfrm>
+            <a:off x="5848502" y="3794760"/>
+            <a:ext cx="921715" cy="960119"/>
+          </a:xfrm>
+          <a:prstGeom prst="rect">
+            <a:avLst/>
+          </a:prstGeom>
+          <a:solidFill>
+            <a:srgbClr val="A8E6A1">
+              <a:alpha val="85000"/>
+            </a:srgbClr>
+          </a:solidFill>
+          <a:ln w="12700">
+            <a:solidFill>
+              <a:srgbClr val="A8E6A1">
+                <a:alpha val="85000"/>
+              </a:srgbClr>
+            </a:solidFill>
+          </a:ln>
+          <a:effectLst/>
+        </p:spPr>
+        <p:txBody>
+          <a:bodyPr rtlCol="0" anchor="ctr"/>
+          <a:lstStyle/>
+          <a:p>
+            <a:pPr algn="ctr"/>
+          </a:p>
+        </p:txBody>
+      </p:sp>
+      <p:sp>
+        <p:nvSpPr>
+          <p:cNvPr id="34" name="A-E12 text 32" descr="sci-ppt:o032"/>
+          <p:cNvSpPr txBox="1"/>
+          <p:nvPr/>
+        </p:nvSpPr>
+        <p:spPr>
+          <a:xfrm>
+            <a:off x="5619902" y="3520440"/>
+            <a:ext cx="1378915" cy="223900"/>
+          </a:xfrm>
+          <a:prstGeom prst="rect">
+            <a:avLst/>
+          </a:prstGeom>
+          <a:noFill/>
+          <a:effectLst/>
+        </p:spPr>
+        <p:txBody>
+          <a:bodyPr wrap="none" lIns="18288" rIns="18288" tIns="18288" bIns="18288" anchor="t">
+            <a:spAutoFit/>
+          </a:bodyPr>
+          <a:lstStyle/>
+          <a:p>
+            <a:pPr algn="ctr">
+              <a:spcAft>
+                <a:spcPts val="0"/>
+              </a:spcAft>
+            </a:pPr>
+            <a:r>
+              <a:rPr sz="1150" b="1" i="0">
+                <a:solidFill>
+                  <a:srgbClr val="E7F0F3"/>
+                </a:solidFill>
+                <a:latin typeface="Arial"/>
+              </a:rPr>
+              <a:t>0.35</a:t>
+            </a:r>
+          </a:p>
+        </p:txBody>
+      </p:sp>
+      <p:sp>
+        <p:nvSpPr>
+          <p:cNvPr id="35" name="A-E12 text 33" descr="sci-ppt:o033"/>
+          <p:cNvSpPr txBox="1"/>
+          <p:nvPr/>
+        </p:nvSpPr>
+        <p:spPr>
+          <a:xfrm>
+            <a:off x="5574182" y="4828032"/>
+            <a:ext cx="1470355" cy="216153"/>
+          </a:xfrm>
+          <a:prstGeom prst="rect">
+            <a:avLst/>
+          </a:prstGeom>
+          <a:noFill/>
+          <a:effectLst/>
+        </p:spPr>
+        <p:txBody>
+          <a:bodyPr wrap="none" lIns="18288" rIns="18288" tIns="18288" bIns="18288" anchor="t">
+            <a:spAutoFit/>
+          </a:bodyPr>
+          <a:lstStyle/>
+          <a:p>
+            <a:pPr algn="ctr">
+              <a:spcAft>
+                <a:spcPts val="0"/>
+              </a:spcAft>
+            </a:pPr>
+            <a:r>
+              <a:rPr sz="1100" b="0" i="0">
+                <a:solidFill>
+                  <a:srgbClr val="B4C7D2"/>
+                </a:solidFill>
+                <a:latin typeface="Arial"/>
+              </a:rPr>
+              <a:t>= dK_g/dt</a:t>
+            </a:r>
+          </a:p>
+        </p:txBody>
+      </p:sp>
+      <p:sp>
+        <p:nvSpPr>
+          <p:cNvPr id="36" name="A-E12 round_rect 34" descr="sci-ppt:o034"/>
+          <p:cNvSpPr/>
+          <p:nvPr/>
+        </p:nvSpPr>
+        <p:spPr>
+          <a:xfrm>
+            <a:off x="7315200" y="914400"/>
+            <a:ext cx="4526280" cy="4023360"/>
+          </a:xfrm>
+          <a:prstGeom prst="roundRect">
             <a:avLst/>
           </a:prstGeom>
           <a:solidFill>
             <a:srgbClr val="213E4B"/>
           </a:solidFill>
-          <a:ln w="17780">
+          <a:ln w="20320">
             <a:solidFill>
-              <a:srgbClr val="B4C7D2"/>
+              <a:srgbClr val="8EDBD4"/>
             </a:solidFill>
           </a:ln>
           <a:effectLst/>
@@ -3198,40 +4252,16 @@
           </a:p>
         </p:txBody>
       </p:sp>
-      <p:cxnSp>
-        <p:nvCxnSpPr>
-          <p:cNvPr id="5" name="arrow 3" descr="sci-ppt:obj-003"/>
-          <p:cNvCxnSpPr/>
-          <p:nvPr/>
-        </p:nvCxnSpPr>
-        <p:spPr>
-          <a:xfrm>
-            <a:off x="1645920" y="1636776"/>
-            <a:ext cx="704088" cy="0"/>
-          </a:xfrm>
-          <a:prstGeom prst="line">
-            <a:avLst/>
-          </a:prstGeom>
-          <a:ln w="21590">
-            <a:solidFill>
-              <a:srgbClr val="8EDBD4"/>
-            </a:solidFill>
-            <a:headEnd type="none" w="med" len="med"/>
-            <a:tailEnd type="triangle" w="med" len="med"/>
-          </a:ln>
-          <a:effectLst/>
-        </p:spPr>
-      </p:cxnSp>
-      <p:sp>
-        <p:nvSpPr>
-          <p:cNvPr id="6" name="text 4" descr="sci-ppt:obj-004"/>
+      <p:sp>
+        <p:nvSpPr>
+          <p:cNvPr id="37" name="A-E12 text 35" descr="sci-ppt:o035"/>
           <p:cNvSpPr txBox="1"/>
           <p:nvPr/>
         </p:nvSpPr>
         <p:spPr>
           <a:xfrm>
-            <a:off x="2011680" y="1252728"/>
-            <a:ext cx="822960" cy="310896"/>
+            <a:off x="7424927" y="969264"/>
+            <a:ext cx="4306824" cy="254889"/>
           </a:xfrm>
           <a:prstGeom prst="rect">
             <a:avLst/>
@@ -3240,7 +4270,7 @@
           <a:effectLst/>
         </p:spPr>
         <p:txBody>
-          <a:bodyPr wrap="none" lIns="0" rIns="0" tIns="0" bIns="0" anchor="ctr">
+          <a:bodyPr wrap="none" lIns="18288" rIns="18288" tIns="18288" bIns="18288" anchor="t">
             <a:spAutoFit/>
           </a:bodyPr>
           <a:lstStyle/>
@@ -3251,27 +4281,67 @@
               </a:spcAft>
             </a:pPr>
             <a:r>
-              <a:rPr sz="1296" b="0" i="0">
+              <a:rPr sz="1350" b="1" i="0">
+                <a:solidFill>
+                  <a:srgbClr val="8EDBD4"/>
+                </a:solidFill>
+                <a:latin typeface="Arial"/>
+              </a:rPr>
+              <a:t>Energy bookkeeping</a:t>
+            </a:r>
+          </a:p>
+        </p:txBody>
+      </p:sp>
+      <p:sp>
+        <p:nvSpPr>
+          <p:cNvPr id="38" name="A-E12 text 36" descr="sci-ppt:o036"/>
+          <p:cNvSpPr txBox="1"/>
+          <p:nvPr/>
+        </p:nvSpPr>
+        <p:spPr>
+          <a:xfrm>
+            <a:off x="7452360" y="1371600"/>
+            <a:ext cx="4297680" cy="231648"/>
+          </a:xfrm>
+          <a:prstGeom prst="rect">
+            <a:avLst/>
+          </a:prstGeom>
+          <a:noFill/>
+          <a:effectLst/>
+        </p:spPr>
+        <p:txBody>
+          <a:bodyPr wrap="none" lIns="18288" rIns="18288" tIns="18288" bIns="18288" anchor="t">
+            <a:spAutoFit/>
+          </a:bodyPr>
+          <a:lstStyle/>
+          <a:p>
+            <a:pPr algn="l">
+              <a:spcAft>
+                <a:spcPts val="0"/>
+              </a:spcAft>
+            </a:pPr>
+            <a:r>
+              <a:rPr sz="1200" b="1" i="0">
                 <a:solidFill>
                   <a:srgbClr val="E7F0F3"/>
                 </a:solidFill>
                 <a:latin typeface="Arial"/>
               </a:rPr>
-              <a:t>R</a:t>
-            </a:r>
-          </a:p>
-        </p:txBody>
-      </p:sp>
-      <p:sp>
-        <p:nvSpPr>
-          <p:cNvPr id="7" name="text 5" descr="sci-ppt:obj-005"/>
+              <a:t>K_g = 2πρ_gR³Ṙ²,   E_σ = 4πσR²</a:t>
+            </a:r>
+          </a:p>
+        </p:txBody>
+      </p:sp>
+      <p:sp>
+        <p:nvSpPr>
+          <p:cNvPr id="39" name="A-E12 text 37" descr="sci-ppt:o037"/>
           <p:cNvSpPr txBox="1"/>
           <p:nvPr/>
         </p:nvSpPr>
         <p:spPr>
           <a:xfrm>
-            <a:off x="1005840" y="2459736"/>
-            <a:ext cx="2194560" cy="310896"/>
+            <a:off x="7452360" y="1874519"/>
+            <a:ext cx="4297680" cy="223900"/>
           </a:xfrm>
           <a:prstGeom prst="rect">
             <a:avLst/>
@@ -3280,7 +4350,7 @@
           <a:effectLst/>
         </p:spPr>
         <p:txBody>
-          <a:bodyPr wrap="none" lIns="0" rIns="0" tIns="0" bIns="0" anchor="ctr">
+          <a:bodyPr wrap="none" lIns="18288" rIns="18288" tIns="18288" bIns="18288" anchor="t">
             <a:spAutoFit/>
           </a:bodyPr>
           <a:lstStyle/>
@@ -3291,27 +4361,163 @@
               </a:spcAft>
             </a:pPr>
             <a:r>
-              <a:rPr sz="1296" b="0" i="0">
+              <a:rPr sz="1150" b="1" i="0">
+                <a:solidFill>
+                  <a:srgbClr val="F2B880"/>
+                </a:solidFill>
+                <a:latin typeface="Arial"/>
+              </a:rPr>
+              <a:t>d(K_g + W_g + E_σ)/dt = (p_b − p_∞)V̇ − P_dis</a:t>
+            </a:r>
+          </a:p>
+        </p:txBody>
+      </p:sp>
+      <p:sp>
+        <p:nvSpPr>
+          <p:cNvPr id="40" name="A-E12 text 38" descr="sci-ppt:o038"/>
+          <p:cNvSpPr txBox="1"/>
+          <p:nvPr/>
+        </p:nvSpPr>
+        <p:spPr>
+          <a:xfrm>
+            <a:off x="7452360" y="2468880"/>
+            <a:ext cx="4297680" cy="239395"/>
+          </a:xfrm>
+          <a:prstGeom prst="rect">
+            <a:avLst/>
+          </a:prstGeom>
+          <a:noFill/>
+          <a:effectLst/>
+        </p:spPr>
+        <p:txBody>
+          <a:bodyPr wrap="none" lIns="18288" rIns="18288" tIns="18288" bIns="18288" anchor="t">
+            <a:spAutoFit/>
+          </a:bodyPr>
+          <a:lstStyle/>
+          <a:p>
+            <a:pPr algn="l">
+              <a:spcAft>
+                <a:spcPts val="0"/>
+              </a:spcAft>
+            </a:pPr>
+            <a:r>
+              <a:rPr sz="1250" b="1" i="0">
+                <a:solidFill>
+                  <a:srgbClr val="F28BA0"/>
+                </a:solidFill>
+                <a:latin typeface="Arial"/>
+              </a:rPr>
+              <a:t>P_dis = 16πη_g R Ṙ² ≥ 0</a:t>
+            </a:r>
+          </a:p>
+        </p:txBody>
+      </p:sp>
+      <p:sp>
+        <p:nvSpPr>
+          <p:cNvPr id="41" name="A-E12 text 39" descr="sci-ppt:o039"/>
+          <p:cNvSpPr txBox="1"/>
+          <p:nvPr/>
+        </p:nvSpPr>
+        <p:spPr>
+          <a:xfrm>
+            <a:off x="7452360" y="3063240"/>
+            <a:ext cx="4297680" cy="417576"/>
+          </a:xfrm>
+          <a:prstGeom prst="rect">
+            <a:avLst/>
+          </a:prstGeom>
+          <a:noFill/>
+          <a:effectLst/>
+        </p:spPr>
+        <p:txBody>
+          <a:bodyPr wrap="none" lIns="18288" rIns="18288" tIns="18288" bIns="18288" anchor="t">
+            <a:spAutoFit/>
+          </a:bodyPr>
+          <a:lstStyle/>
+          <a:p>
+            <a:pPr algn="l">
+              <a:spcAft>
+                <a:spcPts val="0"/>
+              </a:spcAft>
+            </a:pPr>
+            <a:r>
+              <a:rPr sz="1200" b="0" i="0">
+                <a:solidFill>
+                  <a:srgbClr val="B4C7D2"/>
+                </a:solidFill>
+                <a:latin typeface="Arial"/>
+              </a:rPr>
+              <a:t>Network work is recoverable; viscous dissipation is</a:t>
+            </a:r>
+          </a:p>
+          <a:p>
+            <a:pPr algn="l">
+              <a:spcAft>
+                <a:spcPts val="0"/>
+              </a:spcAft>
+            </a:pPr>
+            <a:r>
+              <a:rPr sz="1200" b="0" i="0">
+                <a:solidFill>
+                  <a:srgbClr val="B4C7D2"/>
+                </a:solidFill>
+                <a:latin typeface="Arial"/>
+              </a:rPr>
+              <a:t>not.</a:t>
+            </a:r>
+          </a:p>
+        </p:txBody>
+      </p:sp>
+      <p:sp>
+        <p:nvSpPr>
+          <p:cNvPr id="42" name="A-E12 text 40" descr="sci-ppt:o040"/>
+          <p:cNvSpPr txBox="1"/>
+          <p:nvPr/>
+        </p:nvSpPr>
+        <p:spPr>
+          <a:xfrm>
+            <a:off x="548640" y="5074920"/>
+            <a:ext cx="11247120" cy="239395"/>
+          </a:xfrm>
+          <a:prstGeom prst="rect">
+            <a:avLst/>
+          </a:prstGeom>
+          <a:noFill/>
+          <a:effectLst/>
+        </p:spPr>
+        <p:txBody>
+          <a:bodyPr wrap="none" lIns="18288" rIns="18288" tIns="18288" bIns="18288" anchor="t">
+            <a:spAutoFit/>
+          </a:bodyPr>
+          <a:lstStyle/>
+          <a:p>
+            <a:pPr algn="l">
+              <a:spcAft>
+                <a:spcPts val="0"/>
+              </a:spcAft>
+            </a:pPr>
+            <a:r>
+              <a:rPr sz="1250" b="0" i="0">
                 <a:solidFill>
                   <a:srgbClr val="E7F0F3"/>
                 </a:solidFill>
                 <a:latin typeface="Arial"/>
               </a:rPr>
-              <a:t>Rref → R</a:t>
-            </a:r>
-          </a:p>
-        </p:txBody>
-      </p:sp>
-      <p:sp>
-        <p:nvSpPr>
-          <p:cNvPr id="8" name="text 6" descr="sci-ppt:obj-006"/>
+              <a:t>Pressure work splits into medium inertia, recoverable network energy, surface energy and a positive viscous loss.</a:t>
+            </a:r>
+          </a:p>
+        </p:txBody>
+      </p:sp>
+      <p:sp>
+        <p:nvSpPr>
+          <p:cNvPr id="43" name="A-E12 text 41" descr="sci-ppt:o041"/>
           <p:cNvSpPr txBox="1"/>
           <p:nvPr/>
         </p:nvSpPr>
         <p:spPr>
           <a:xfrm>
-            <a:off x="749808" y="649224"/>
-            <a:ext cx="3566160" cy="310896"/>
+            <a:off x="548640" y="5577840"/>
+            <a:ext cx="11247120" cy="231648"/>
           </a:xfrm>
           <a:prstGeom prst="rect">
             <a:avLst/>
@@ -3320,7 +4526,7 @@
           <a:effectLst/>
         </p:spPr>
         <p:txBody>
-          <a:bodyPr wrap="none" lIns="0" rIns="0" tIns="0" bIns="0" anchor="ctr">
+          <a:bodyPr wrap="none" lIns="18288" rIns="18288" tIns="18288" bIns="18288" anchor="t">
             <a:spAutoFit/>
           </a:bodyPr>
           <a:lstStyle/>
@@ -3331,59 +4537,27 @@
               </a:spcAft>
             </a:pPr>
             <a:r>
-              <a:rPr sz="1296" b="0" i="0">
+              <a:rPr sz="1200" b="0" i="0">
                 <a:solidFill>
-                  <a:srgbClr val="E7F0F3"/>
+                  <a:srgbClr val="B4C7D2"/>
                 </a:solidFill>
                 <a:latin typeface="Arial"/>
               </a:rPr>
-              <a:t>Cavity pressure work: pb dV</a:t>
-            </a:r>
-          </a:p>
-        </p:txBody>
-      </p:sp>
-      <p:sp>
-        <p:nvSpPr>
-          <p:cNvPr id="9" name="rect 7" descr="sci-ppt:obj-007"/>
-          <p:cNvSpPr/>
-          <p:nvPr/>
-        </p:nvSpPr>
-        <p:spPr>
-          <a:xfrm>
-            <a:off x="3986784" y="1143000"/>
-            <a:ext cx="3749039" cy="1124712"/>
-          </a:xfrm>
-          <a:prstGeom prst="rect">
-            <a:avLst/>
-          </a:prstGeom>
-          <a:solidFill>
-            <a:srgbClr val="213E4B"/>
-          </a:solidFill>
-          <a:ln w="17780">
-            <a:solidFill>
-              <a:srgbClr val="B4C7D2"/>
-            </a:solidFill>
-          </a:ln>
-          <a:effectLst/>
-        </p:spPr>
-        <p:txBody>
-          <a:bodyPr rtlCol="0" anchor="ctr"/>
-          <a:lstStyle/>
-          <a:p>
-            <a:pPr algn="ctr"/>
-          </a:p>
-        </p:txBody>
-      </p:sp>
-      <p:sp>
-        <p:nvSpPr>
-          <p:cNvPr id="10" name="text 8" descr="sci-ppt:obj-008"/>
+              <a:t>Shares are illustrative; the identity itself is exact within the model.</a:t>
+            </a:r>
+          </a:p>
+        </p:txBody>
+      </p:sp>
+      <p:sp>
+        <p:nvSpPr>
+          <p:cNvPr id="44" name="A-E12 text 42" descr="sci-ppt:o042"/>
           <p:cNvSpPr txBox="1"/>
           <p:nvPr/>
         </p:nvSpPr>
         <p:spPr>
           <a:xfrm>
-            <a:off x="4197096" y="1307592"/>
-            <a:ext cx="3474720" cy="310896"/>
+            <a:off x="320040" y="6510528"/>
+            <a:ext cx="11521440" cy="200660"/>
           </a:xfrm>
           <a:prstGeom prst="rect">
             <a:avLst/>
@@ -3392,7 +4566,7 @@
           <a:effectLst/>
         </p:spPr>
         <p:txBody>
-          <a:bodyPr wrap="none" lIns="0" rIns="0" tIns="0" bIns="0" anchor="ctr">
+          <a:bodyPr wrap="none" lIns="18288" rIns="18288" tIns="18288" bIns="18288" anchor="t">
             <a:spAutoFit/>
           </a:bodyPr>
           <a:lstStyle/>
@@ -3403,517 +4577,13 @@
               </a:spcAft>
             </a:pPr>
             <a:r>
-              <a:rPr sz="1296" b="0" i="0">
+              <a:rPr sz="1000" b="0" i="0">
                 <a:solidFill>
-                  <a:srgbClr val="E7F0F3"/>
+                  <a:srgbClr val="B4C7D2"/>
                 </a:solidFill>
                 <a:latin typeface="Arial"/>
               </a:rPr>
-              <a:t>Elastic storage: Wg</a:t>
-            </a:r>
-          </a:p>
-        </p:txBody>
-      </p:sp>
-      <p:sp>
-        <p:nvSpPr>
-          <p:cNvPr id="11" name="text 9" descr="sci-ppt:obj-009"/>
-          <p:cNvSpPr txBox="1"/>
-          <p:nvPr/>
-        </p:nvSpPr>
-        <p:spPr>
-          <a:xfrm>
-            <a:off x="4197096" y="1700784"/>
-            <a:ext cx="3474720" cy="310896"/>
-          </a:xfrm>
-          <a:prstGeom prst="rect">
-            <a:avLst/>
-          </a:prstGeom>
-          <a:noFill/>
-          <a:effectLst/>
-        </p:spPr>
-        <p:txBody>
-          <a:bodyPr wrap="none" lIns="0" rIns="0" tIns="0" bIns="0" anchor="ctr">
-            <a:spAutoFit/>
-          </a:bodyPr>
-          <a:lstStyle/>
-          <a:p>
-            <a:pPr algn="l">
-              <a:spcAft>
-                <a:spcPts val="0"/>
-              </a:spcAft>
-            </a:pPr>
-            <a:r>
-              <a:rPr sz="1296" b="0" i="0">
-                <a:solidFill>
-                  <a:srgbClr val="E7F0F3"/>
-                </a:solidFill>
-                <a:latin typeface="Arial"/>
-              </a:rPr>
-              <a:t>Viscous loss: Ḋg ≥ 0</a:t>
-            </a:r>
-          </a:p>
-        </p:txBody>
-      </p:sp>
-      <p:cxnSp>
-        <p:nvCxnSpPr>
-          <p:cNvPr id="12" name="arrow 10" descr="sci-ppt:obj-010"/>
-          <p:cNvCxnSpPr/>
-          <p:nvPr/>
-        </p:nvCxnSpPr>
-        <p:spPr>
-          <a:xfrm>
-            <a:off x="2496312" y="1645920"/>
-            <a:ext cx="1444751" cy="0"/>
-          </a:xfrm>
-          <a:prstGeom prst="line">
-            <a:avLst/>
-          </a:prstGeom>
-          <a:ln w="21590">
-            <a:solidFill>
-              <a:srgbClr val="8EDBD4"/>
-            </a:solidFill>
-            <a:headEnd type="none" w="med" len="med"/>
-            <a:tailEnd type="triangle" w="med" len="med"/>
-          </a:ln>
-          <a:effectLst/>
-        </p:spPr>
-      </p:cxnSp>
-      <p:sp>
-        <p:nvSpPr>
-          <p:cNvPr id="13" name="text 11" descr="sci-ppt:obj-011"/>
-          <p:cNvSpPr txBox="1"/>
-          <p:nvPr/>
-        </p:nvSpPr>
-        <p:spPr>
-          <a:xfrm>
-            <a:off x="3986784" y="2432304"/>
-            <a:ext cx="4114800" cy="310896"/>
-          </a:xfrm>
-          <a:prstGeom prst="rect">
-            <a:avLst/>
-          </a:prstGeom>
-          <a:noFill/>
-          <a:effectLst/>
-        </p:spPr>
-        <p:txBody>
-          <a:bodyPr wrap="none" lIns="0" rIns="0" tIns="0" bIns="0" anchor="ctr">
-            <a:spAutoFit/>
-          </a:bodyPr>
-          <a:lstStyle/>
-          <a:p>
-            <a:pPr algn="l">
-              <a:spcAft>
-                <a:spcPts val="0"/>
-              </a:spcAft>
-            </a:pPr>
-            <a:r>
-              <a:rPr sz="1296" b="0" i="0">
-                <a:solidFill>
-                  <a:srgbClr val="E7F0F3"/>
-                </a:solidFill>
-                <a:latin typeface="Arial"/>
-              </a:rPr>
-              <a:t>Gg , ηg ; intact network</a:t>
-            </a:r>
-          </a:p>
-        </p:txBody>
-      </p:sp>
-      <p:sp>
-        <p:nvSpPr>
-          <p:cNvPr id="14" name="text 12" descr="sci-ppt:obj-012"/>
-          <p:cNvSpPr txBox="1"/>
-          <p:nvPr/>
-        </p:nvSpPr>
-        <p:spPr>
-          <a:xfrm>
-            <a:off x="749808" y="2871216"/>
-            <a:ext cx="7772400" cy="310896"/>
-          </a:xfrm>
-          <a:prstGeom prst="rect">
-            <a:avLst/>
-          </a:prstGeom>
-          <a:noFill/>
-          <a:effectLst/>
-        </p:spPr>
-        <p:txBody>
-          <a:bodyPr wrap="none" lIns="0" rIns="0" tIns="0" bIns="0" anchor="ctr">
-            <a:spAutoFit/>
-          </a:bodyPr>
-          <a:lstStyle/>
-          <a:p>
-            <a:pPr algn="l">
-              <a:spcAft>
-                <a:spcPts val="0"/>
-              </a:spcAft>
-            </a:pPr>
-            <a:r>
-              <a:rPr sz="1224" b="0" i="0">
-                <a:solidFill>
-                  <a:srgbClr val="E7F0F3"/>
-                </a:solidFill>
-                <a:latin typeface="Arial"/>
-              </a:rPr>
-              <a:t>Jet energy requires a separate load path and budget</a:t>
-            </a:r>
-          </a:p>
-        </p:txBody>
-      </p:sp>
-      <p:sp>
-        <p:nvSpPr>
-          <p:cNvPr id="15" name="text 13" descr="sci-ppt:obj-013"/>
-          <p:cNvSpPr txBox="1"/>
-          <p:nvPr/>
-        </p:nvSpPr>
-        <p:spPr>
-          <a:xfrm>
-            <a:off x="256032" y="3465576"/>
-            <a:ext cx="7315200" cy="310896"/>
-          </a:xfrm>
-          <a:prstGeom prst="rect">
-            <a:avLst/>
-          </a:prstGeom>
-          <a:noFill/>
-          <a:effectLst/>
-        </p:spPr>
-        <p:txBody>
-          <a:bodyPr wrap="none" lIns="0" rIns="0" tIns="0" bIns="0" anchor="ctr">
-            <a:spAutoFit/>
-          </a:bodyPr>
-          <a:lstStyle/>
-          <a:p>
-            <a:pPr algn="l">
-              <a:spcAft>
-                <a:spcPts val="0"/>
-              </a:spcAft>
-            </a:pPr>
-            <a:r>
-              <a:rPr sz="1296" b="0" i="0">
-                <a:solidFill>
-                  <a:srgbClr val="8EDBD4"/>
-                </a:solidFill>
-                <a:latin typeface="Arial"/>
-              </a:rPr>
-              <a:t>Variables and physical limits</a:t>
-            </a:r>
-          </a:p>
-        </p:txBody>
-      </p:sp>
-      <p:sp>
-        <p:nvSpPr>
-          <p:cNvPr id="16" name="text 14" descr="sci-ppt:obj-014"/>
-          <p:cNvSpPr txBox="1"/>
-          <p:nvPr/>
-        </p:nvSpPr>
-        <p:spPr>
-          <a:xfrm>
-            <a:off x="365760" y="3813048"/>
-            <a:ext cx="8412480" cy="310896"/>
-          </a:xfrm>
-          <a:prstGeom prst="rect">
-            <a:avLst/>
-          </a:prstGeom>
-          <a:noFill/>
-          <a:effectLst/>
-        </p:spPr>
-        <p:txBody>
-          <a:bodyPr wrap="none" lIns="0" rIns="0" tIns="0" bIns="0" anchor="ctr">
-            <a:spAutoFit/>
-          </a:bodyPr>
-          <a:lstStyle/>
-          <a:p>
-            <a:pPr algn="l">
-              <a:spcAft>
-                <a:spcPts val="0"/>
-              </a:spcAft>
-            </a:pPr>
-            <a:r>
-              <a:rPr sz="1152" b="0" i="0">
-                <a:solidFill>
-                  <a:srgbClr val="E7F0F3"/>
-                </a:solidFill>
-                <a:latin typeface="Arial"/>
-              </a:rPr>
-              <a:t>• (pb−p∞)V̇: pressure work</a:t>
-            </a:r>
-          </a:p>
-        </p:txBody>
-      </p:sp>
-      <p:sp>
-        <p:nvSpPr>
-          <p:cNvPr id="17" name="text 15" descr="sci-ppt:obj-015"/>
-          <p:cNvSpPr txBox="1"/>
-          <p:nvPr/>
-        </p:nvSpPr>
-        <p:spPr>
-          <a:xfrm>
-            <a:off x="365760" y="4023360"/>
-            <a:ext cx="8412480" cy="310896"/>
-          </a:xfrm>
-          <a:prstGeom prst="rect">
-            <a:avLst/>
-          </a:prstGeom>
-          <a:noFill/>
-          <a:effectLst/>
-        </p:spPr>
-        <p:txBody>
-          <a:bodyPr wrap="none" lIns="0" rIns="0" tIns="0" bIns="0" anchor="ctr">
-            <a:spAutoFit/>
-          </a:bodyPr>
-          <a:lstStyle/>
-          <a:p>
-            <a:pPr algn="l">
-              <a:spcAft>
-                <a:spcPts val="0"/>
-              </a:spcAft>
-            </a:pPr>
-            <a:r>
-              <a:rPr sz="1152" b="0" i="0">
-                <a:solidFill>
-                  <a:srgbClr val="E7F0F3"/>
-                </a:solidFill>
-                <a:latin typeface="Arial"/>
-              </a:rPr>
-              <a:t>• Kg: moving exterior</a:t>
-            </a:r>
-          </a:p>
-        </p:txBody>
-      </p:sp>
-      <p:sp>
-        <p:nvSpPr>
-          <p:cNvPr id="18" name="text 16" descr="sci-ppt:obj-016"/>
-          <p:cNvSpPr txBox="1"/>
-          <p:nvPr/>
-        </p:nvSpPr>
-        <p:spPr>
-          <a:xfrm>
-            <a:off x="365760" y="4233672"/>
-            <a:ext cx="8412480" cy="310896"/>
-          </a:xfrm>
-          <a:prstGeom prst="rect">
-            <a:avLst/>
-          </a:prstGeom>
-          <a:noFill/>
-          <a:effectLst/>
-        </p:spPr>
-        <p:txBody>
-          <a:bodyPr wrap="none" lIns="0" rIns="0" tIns="0" bIns="0" anchor="ctr">
-            <a:spAutoFit/>
-          </a:bodyPr>
-          <a:lstStyle/>
-          <a:p>
-            <a:pPr algn="l">
-              <a:spcAft>
-                <a:spcPts val="0"/>
-              </a:spcAft>
-            </a:pPr>
-            <a:r>
-              <a:rPr sz="1152" b="0" i="0">
-                <a:solidFill>
-                  <a:srgbClr val="E7F0F3"/>
-                </a:solidFill>
-                <a:latin typeface="Arial"/>
-              </a:rPr>
-              <a:t>• Wg: network storage</a:t>
-            </a:r>
-          </a:p>
-        </p:txBody>
-      </p:sp>
-      <p:sp>
-        <p:nvSpPr>
-          <p:cNvPr id="19" name="text 17" descr="sci-ppt:obj-017"/>
-          <p:cNvSpPr txBox="1"/>
-          <p:nvPr/>
-        </p:nvSpPr>
-        <p:spPr>
-          <a:xfrm>
-            <a:off x="365760" y="4443984"/>
-            <a:ext cx="8412480" cy="310896"/>
-          </a:xfrm>
-          <a:prstGeom prst="rect">
-            <a:avLst/>
-          </a:prstGeom>
-          <a:noFill/>
-          <a:effectLst/>
-        </p:spPr>
-        <p:txBody>
-          <a:bodyPr wrap="none" lIns="0" rIns="0" tIns="0" bIns="0" anchor="ctr">
-            <a:spAutoFit/>
-          </a:bodyPr>
-          <a:lstStyle/>
-          <a:p>
-            <a:pPr algn="l">
-              <a:spcAft>
-                <a:spcPts val="0"/>
-              </a:spcAft>
-            </a:pPr>
-            <a:r>
-              <a:rPr sz="1152" b="0" i="0">
-                <a:solidFill>
-                  <a:srgbClr val="E7F0F3"/>
-                </a:solidFill>
-                <a:latin typeface="Arial"/>
-              </a:rPr>
-              <a:t>• Eσ: cavity surface</a:t>
-            </a:r>
-          </a:p>
-        </p:txBody>
-      </p:sp>
-      <p:sp>
-        <p:nvSpPr>
-          <p:cNvPr id="20" name="text 18" descr="sci-ppt:obj-018"/>
-          <p:cNvSpPr txBox="1"/>
-          <p:nvPr/>
-        </p:nvSpPr>
-        <p:spPr>
-          <a:xfrm>
-            <a:off x="365760" y="4654296"/>
-            <a:ext cx="8412480" cy="310896"/>
-          </a:xfrm>
-          <a:prstGeom prst="rect">
-            <a:avLst/>
-          </a:prstGeom>
-          <a:noFill/>
-          <a:effectLst/>
-        </p:spPr>
-        <p:txBody>
-          <a:bodyPr wrap="none" lIns="0" rIns="0" tIns="0" bIns="0" anchor="ctr">
-            <a:spAutoFit/>
-          </a:bodyPr>
-          <a:lstStyle/>
-          <a:p>
-            <a:pPr algn="l">
-              <a:spcAft>
-                <a:spcPts val="0"/>
-              </a:spcAft>
-            </a:pPr>
-            <a:r>
-              <a:rPr sz="1152" b="0" i="0">
-                <a:solidFill>
-                  <a:srgbClr val="E7F0F3"/>
-                </a:solidFill>
-                <a:latin typeface="Arial"/>
-              </a:rPr>
-              <a:t>• Pdis ≥ 0: irreversible loss</a:t>
-            </a:r>
-          </a:p>
-        </p:txBody>
-      </p:sp>
-      <p:sp>
-        <p:nvSpPr>
-          <p:cNvPr id="21" name="text 19" descr="sci-ppt:obj-019"/>
-          <p:cNvSpPr txBox="1"/>
-          <p:nvPr/>
-        </p:nvSpPr>
-        <p:spPr>
-          <a:xfrm>
-            <a:off x="365760" y="4864608"/>
-            <a:ext cx="8412480" cy="310896"/>
-          </a:xfrm>
-          <a:prstGeom prst="rect">
-            <a:avLst/>
-          </a:prstGeom>
-          <a:noFill/>
-          <a:effectLst/>
-        </p:spPr>
-        <p:txBody>
-          <a:bodyPr wrap="none" lIns="0" rIns="0" tIns="0" bIns="0" anchor="ctr">
-            <a:spAutoFit/>
-          </a:bodyPr>
-          <a:lstStyle/>
-          <a:p>
-            <a:pPr algn="l">
-              <a:spcAft>
-                <a:spcPts val="0"/>
-              </a:spcAft>
-            </a:pPr>
-            <a:r>
-              <a:rPr sz="1152" b="0" i="0">
-                <a:solidFill>
-                  <a:srgbClr val="E7F0F3"/>
-                </a:solidFill>
-                <a:latin typeface="Arial"/>
-              </a:rPr>
-              <a:t>• R, Ṙ, ρg, ηg, σ, t</a:t>
-            </a:r>
-          </a:p>
-        </p:txBody>
-      </p:sp>
-      <p:sp>
-        <p:nvSpPr>
-          <p:cNvPr id="22" name="text 20" descr="sci-ppt:obj-020"/>
-          <p:cNvSpPr txBox="1"/>
-          <p:nvPr/>
-        </p:nvSpPr>
-        <p:spPr>
-          <a:xfrm>
-            <a:off x="365760" y="5074920"/>
-            <a:ext cx="8412480" cy="310896"/>
-          </a:xfrm>
-          <a:prstGeom prst="rect">
-            <a:avLst/>
-          </a:prstGeom>
-          <a:noFill/>
-          <a:effectLst/>
-        </p:spPr>
-        <p:txBody>
-          <a:bodyPr wrap="none" lIns="0" rIns="0" tIns="0" bIns="0" anchor="ctr">
-            <a:spAutoFit/>
-          </a:bodyPr>
-          <a:lstStyle/>
-          <a:p>
-            <a:pPr algn="l">
-              <a:spcAft>
-                <a:spcPts val="0"/>
-              </a:spcAft>
-            </a:pPr>
-            <a:r>
-              <a:rPr sz="1152" b="0" i="0">
-                <a:solidFill>
-                  <a:srgbClr val="E7F0F3"/>
-                </a:solidFill>
-                <a:latin typeface="Arial"/>
-              </a:rPr>
-              <a:t>Network work can return; dashpot loss cannot</a:t>
-            </a:r>
-          </a:p>
-        </p:txBody>
-      </p:sp>
-      <p:sp>
-        <p:nvSpPr>
-          <p:cNvPr id="23" name="text 21" descr="sci-ppt:obj-021"/>
-          <p:cNvSpPr txBox="1"/>
-          <p:nvPr/>
-        </p:nvSpPr>
-        <p:spPr>
-          <a:xfrm>
-            <a:off x="365760" y="5285232"/>
-            <a:ext cx="8412480" cy="310896"/>
-          </a:xfrm>
-          <a:prstGeom prst="rect">
-            <a:avLst/>
-          </a:prstGeom>
-          <a:noFill/>
-          <a:effectLst/>
-        </p:spPr>
-        <p:txBody>
-          <a:bodyPr wrap="none" lIns="0" rIns="0" tIns="0" bIns="0" anchor="ctr">
-            <a:spAutoFit/>
-          </a:bodyPr>
-          <a:lstStyle/>
-          <a:p>
-            <a:pPr algn="l">
-              <a:spcAft>
-                <a:spcPts val="0"/>
-              </a:spcAft>
-            </a:pPr>
-            <a:r>
-              <a:rPr sz="1152" b="0" i="0">
-                <a:solidFill>
-                  <a:srgbClr val="E7F0F3"/>
-                </a:solidFill>
-                <a:latin typeface="Arial"/>
-              </a:rPr>
-              <a:t>Volume rate fixes work signs</a:t>
+              <a:t>Mechanical energy balance of Eq. A-E12 (shares schematic).</a:t>
             </a:r>
           </a:p>
         </p:txBody>
